--- a/classes/parte-7-red-team-y-operaciones-ofensivas/172-active-directory-pass-the-hash-y-pass-the-ticket/clase-172-presentacion.pptx
+++ b/classes/parte-7-red-team-y-operaciones-ofensivas/172-active-directory-pass-the-hash-y-pass-the-ticket/clase-172-presentacion.pptx
@@ -17,6 +17,9 @@
     <p:sldId id="265" r:id="rId16"/>
     <p:sldId id="266" r:id="rId17"/>
     <p:sldId id="267" r:id="rId18"/>
+    <p:sldId id="268" r:id="rId19"/>
+    <p:sldId id="269" r:id="rId20"/>
+    <p:sldId id="270" r:id="rId21"/>
   </p:sldIdLst>
   <p:sldSz cx="9144000" cy="6858000" type="screen4x3"/>
   <p:notesSz cx="6858000" cy="9144000"/>
@@ -3198,7 +3201,7 @@
                   <a:srgbClr val="0B3D2E"/>
                 </a:solidFill>
               </a:rPr>
-              <a:t>⚠️ Errores comunes</a:t>
+              <a:t>✍️ Ejercicios</a:t>
             </a:r>
           </a:p>
         </p:txBody>
@@ -3236,67 +3239,82 @@
                   <a:srgbClr val="22282E"/>
                 </a:solidFill>
               </a:rPr>
-              <a:t>•  PtH rechazado (STATUSLOGONFAILURE) — Hash o usuario incorrecto, o cuenta de dominio (usa --local-auth para local)</a:t>
-            </a:r>
-          </a:p>
-          <a:p>
-            <a:pPr>
-              <a:spcAft>
-                <a:spcPts val="600"/>
-              </a:spcAft>
-            </a:pPr>
-            <a:r>
-              <a:rPr sz="1500">
-                <a:solidFill>
-                  <a:srgbClr val="22282E"/>
-                </a:solidFill>
-              </a:rPr>
-              <a:t>•  No puedo leer LSASS — Falta admin local o Credential Guard activo; consíguelo o cambia de técnica</a:t>
-            </a:r>
-          </a:p>
-          <a:p>
-            <a:pPr>
-              <a:spcAft>
-                <a:spcPts val="600"/>
-              </a:spcAft>
-            </a:pPr>
-            <a:r>
-              <a:rPr sz="1500">
-                <a:solidFill>
-                  <a:srgbClr val="22282E"/>
-                </a:solidFill>
-              </a:rPr>
-              <a:t>•  PtT no autentica — Ticket expirado o para otro servicio; verifica caducidad y SPN</a:t>
-            </a:r>
-          </a:p>
-          <a:p>
-            <a:pPr>
-              <a:spcAft>
-                <a:spcPts val="600"/>
-              </a:spcAft>
-            </a:pPr>
-            <a:r>
-              <a:rPr sz="1500">
-                <a:solidFill>
-                  <a:srgbClr val="22282E"/>
-                </a:solidFill>
-              </a:rPr>
-              <a:t>•  Overpass falla — Etype/hash equivocado; usa el hash NTLM correcto con /rc4</a:t>
-            </a:r>
-          </a:p>
-          <a:p>
-            <a:pPr>
-              <a:spcAft>
-                <a:spcPts val="600"/>
-              </a:spcAft>
-            </a:pPr>
-            <a:r>
-              <a:rPr sz="1500">
-                <a:solidFill>
-                  <a:srgbClr val="22282E"/>
-                </a:solidFill>
-              </a:rPr>
-              <a:t>•  Detectado al dumpear — Acceso a LSASS muy vigilado; asume telemetría (Sysmon EID 10)</a:t>
+              <a:t>•  Explica por qué NTLM permite Pass-the-Hash y Kerberos no directamente.</a:t>
+            </a:r>
+          </a:p>
+          <a:p>
+            <a:pPr>
+              <a:spcAft>
+                <a:spcPts val="600"/>
+              </a:spcAft>
+            </a:pPr>
+            <a:r>
+              <a:rPr sz="1500">
+                <a:solidFill>
+                  <a:srgbClr val="22282E"/>
+                </a:solidFill>
+              </a:rPr>
+              <a:t>•  Ejecuta PtH para acceder a una segunda máquina del lab.</a:t>
+            </a:r>
+          </a:p>
+          <a:p>
+            <a:pPr>
+              <a:spcAft>
+                <a:spcPts val="600"/>
+              </a:spcAft>
+            </a:pPr>
+            <a:r>
+              <a:rPr sz="1500">
+                <a:solidFill>
+                  <a:srgbClr val="22282E"/>
+                </a:solidFill>
+              </a:rPr>
+              <a:t>•  Realiza Overpass-the-Hash y confirma el TGT con klist.</a:t>
+            </a:r>
+          </a:p>
+          <a:p>
+            <a:pPr>
+              <a:spcAft>
+                <a:spcPts val="600"/>
+              </a:spcAft>
+            </a:pPr>
+            <a:r>
+              <a:rPr sz="1500">
+                <a:solidFill>
+                  <a:srgbClr val="22282E"/>
+                </a:solidFill>
+              </a:rPr>
+              <a:t>•  Roba e inyecta un TGT para moverte a una tercera máquina.</a:t>
+            </a:r>
+          </a:p>
+          <a:p>
+            <a:pPr>
+              <a:spcAft>
+                <a:spcPts val="600"/>
+              </a:spcAft>
+            </a:pPr>
+            <a:r>
+              <a:rPr sz="1500">
+                <a:solidFill>
+                  <a:srgbClr val="22282E"/>
+                </a:solidFill>
+              </a:rPr>
+              <a:t>•  Investiga cómo Credential Guard rompe la extracción de LSASS.</a:t>
+            </a:r>
+          </a:p>
+          <a:p>
+            <a:pPr>
+              <a:spcAft>
+                <a:spcPts val="600"/>
+              </a:spcAft>
+            </a:pPr>
+            <a:r>
+              <a:rPr sz="1500">
+                <a:solidFill>
+                  <a:srgbClr val="22282E"/>
+                </a:solidFill>
+              </a:rPr>
+              <a:t>•  Describe el modelo de tiering de Microsoft y cómo limita el movimiento lateral.</a:t>
             </a:r>
           </a:p>
         </p:txBody>
@@ -3347,7 +3365,7 @@
                   <a:srgbClr val="0B3D2E"/>
                 </a:solidFill>
               </a:rPr>
-              <a:t>❓ Preguntas frecuentes</a:t>
+              <a:t>📝 Reto verificable</a:t>
             </a:r>
           </a:p>
         </p:txBody>
@@ -3385,82 +3403,22 @@
                   <a:srgbClr val="22282E"/>
                 </a:solidFill>
               </a:rPr>
-              <a:t>•  ❓ ¿PtH sigue funcionando en Windows moderno?</a:t>
-            </a:r>
-          </a:p>
-          <a:p>
-            <a:pPr>
-              <a:spcAft>
-                <a:spcPts val="600"/>
-              </a:spcAft>
-            </a:pPr>
-            <a:r>
-              <a:rPr sz="1500">
-                <a:solidFill>
-                  <a:srgbClr val="22282E"/>
-                </a:solidFill>
-              </a:rPr>
-              <a:t>•  Sí, mientras se use NTLM. Credential Guard, LSA protection y el modelo de tiering lo dificultan, pero muchos entornos siguen siendo vulnerables.</a:t>
-            </a:r>
-          </a:p>
-          <a:p>
-            <a:pPr>
-              <a:spcAft>
-                <a:spcPts val="600"/>
-              </a:spcAft>
-            </a:pPr>
-            <a:r>
-              <a:rPr sz="1500">
-                <a:solidFill>
-                  <a:srgbClr val="22282E"/>
-                </a:solidFill>
-              </a:rPr>
-              <a:t>•  ❓ ¿Diferencia entre PtH y PtT?</a:t>
-            </a:r>
-          </a:p>
-          <a:p>
-            <a:pPr>
-              <a:spcAft>
-                <a:spcPts val="600"/>
-              </a:spcAft>
-            </a:pPr>
-            <a:r>
-              <a:rPr sz="1500">
-                <a:solidFill>
-                  <a:srgbClr val="22282E"/>
-                </a:solidFill>
-              </a:rPr>
-              <a:t>•  PtH reutiliza el hash NTLM (autenticación NTLM); PtT reutiliza un ticket Kerberos ya emitido. Overpass-the-Hash es el puente: del hash a un TGT.</a:t>
-            </a:r>
-          </a:p>
-          <a:p>
-            <a:pPr>
-              <a:spcAft>
-                <a:spcPts val="600"/>
-              </a:spcAft>
-            </a:pPr>
-            <a:r>
-              <a:rPr sz="1500">
-                <a:solidFill>
-                  <a:srgbClr val="22282E"/>
-                </a:solidFill>
-              </a:rPr>
-              <a:t>•  ❓ ¿Cómo se defiende una organización?</a:t>
-            </a:r>
-          </a:p>
-          <a:p>
-            <a:pPr>
-              <a:spcAft>
-                <a:spcPts val="600"/>
-              </a:spcAft>
-            </a:pPr>
-            <a:r>
-              <a:rPr sz="1500">
-                <a:solidFill>
-                  <a:srgbClr val="22282E"/>
-                </a:solidFill>
-              </a:rPr>
-              <a:t>•  Credential Guard, deshabilitar NTLM donde se pueda, tiering administrativo, LAPS para contraseñas locales únicas y monitorización de accesos a LSASS.</a:t>
+              <a:t>•  Partiendo de admin local en una máquina del lab, muévete lateralmente a otras dos máquinas usando Pass-the-Hash y Pass-the-Ticket (una técnica cada una), sin conocer contraseñas en claro.</a:t>
+            </a:r>
+          </a:p>
+          <a:p>
+            <a:pPr>
+              <a:spcAft>
+                <a:spcPts val="600"/>
+              </a:spcAft>
+            </a:pPr>
+            <a:r>
+              <a:rPr sz="1500">
+                <a:solidFill>
+                  <a:srgbClr val="22282E"/>
+                </a:solidFill>
+              </a:rPr>
+              <a:t>•  Criterio de aceptación: obtienes ejecución de comandos en dos máquinas destino distintas, una vía PtH y otra vía PtT, mostrando los comandos empleados y el material (hash/ticket) reutilizado. Todo en…</a:t>
             </a:r>
           </a:p>
         </p:txBody>
@@ -3511,7 +3469,7 @@
                   <a:srgbClr val="0B3D2E"/>
                 </a:solidFill>
               </a:rPr>
-              <a:t>🔗 Referencias</a:t>
+              <a:t>⚠️ Errores comunes</a:t>
             </a:r>
           </a:p>
         </p:txBody>
@@ -3549,56 +3507,474 @@
                   <a:srgbClr val="22282E"/>
                 </a:solidFill>
               </a:rPr>
-              <a:t>•  The Hacker Recipes — Pass-the-Hash / Pass-the-Ticket. &lt;https://www.thehacker.recipes/ad/movement/&gt;</a:t>
-            </a:r>
-          </a:p>
-          <a:p>
-            <a:pPr>
-              <a:spcAft>
-                <a:spcPts val="600"/>
-              </a:spcAft>
-            </a:pPr>
-            <a:r>
-              <a:rPr sz="1500">
-                <a:solidFill>
-                  <a:srgbClr val="22282E"/>
-                </a:solidFill>
-              </a:rPr>
-              <a:t>•  MITRE ATT&amp;CK — Use Alternate Authentication Material (T1550). &lt;https://attack.mitre.org/techniques/T1550/&gt;</a:t>
-            </a:r>
-          </a:p>
-          <a:p>
-            <a:pPr>
-              <a:spcAft>
-                <a:spcPts val="600"/>
-              </a:spcAft>
-            </a:pPr>
-            <a:r>
-              <a:rPr sz="1500">
-                <a:solidFill>
-                  <a:srgbClr val="22282E"/>
-                </a:solidFill>
-              </a:rPr>
-              <a:t>•  Impacket. &lt;https://github.com/fortra/impacket&gt;</a:t>
-            </a:r>
-          </a:p>
-          <a:p>
-            <a:pPr>
-              <a:spcAft>
-                <a:spcPts val="600"/>
-              </a:spcAft>
-            </a:pPr>
-            <a:r>
-              <a:rPr sz="1500">
-                <a:solidFill>
-                  <a:srgbClr val="22282E"/>
-                </a:solidFill>
-              </a:rPr>
-              <a:t>•  Rubeus. &lt;https://github.com/GhostPack/Rubeus&gt;</a:t>
-            </a:r>
-          </a:p>
-        </p:txBody>
-      </p:sp>
+              <a:t>•  PtH rechazado (STATUSLOGONFAILURE) — Hash o usuario incorrecto, o cuenta de dominio (usa --local-auth para local)</a:t>
+            </a:r>
+          </a:p>
+          <a:p>
+            <a:pPr>
+              <a:spcAft>
+                <a:spcPts val="600"/>
+              </a:spcAft>
+            </a:pPr>
+            <a:r>
+              <a:rPr sz="1500">
+                <a:solidFill>
+                  <a:srgbClr val="22282E"/>
+                </a:solidFill>
+              </a:rPr>
+              <a:t>•  No puedo leer LSASS — Falta admin local o Credential Guard activo; consíguelo o cambia de técnica</a:t>
+            </a:r>
+          </a:p>
+          <a:p>
+            <a:pPr>
+              <a:spcAft>
+                <a:spcPts val="600"/>
+              </a:spcAft>
+            </a:pPr>
+            <a:r>
+              <a:rPr sz="1500">
+                <a:solidFill>
+                  <a:srgbClr val="22282E"/>
+                </a:solidFill>
+              </a:rPr>
+              <a:t>•  PtT no autentica — Ticket expirado o para otro servicio; verifica caducidad y SPN</a:t>
+            </a:r>
+          </a:p>
+          <a:p>
+            <a:pPr>
+              <a:spcAft>
+                <a:spcPts val="600"/>
+              </a:spcAft>
+            </a:pPr>
+            <a:r>
+              <a:rPr sz="1500">
+                <a:solidFill>
+                  <a:srgbClr val="22282E"/>
+                </a:solidFill>
+              </a:rPr>
+              <a:t>•  Overpass falla — Etype/hash equivocado; usa el hash NTLM correcto con /rc4</a:t>
+            </a:r>
+          </a:p>
+          <a:p>
+            <a:pPr>
+              <a:spcAft>
+                <a:spcPts val="600"/>
+              </a:spcAft>
+            </a:pPr>
+            <a:r>
+              <a:rPr sz="1500">
+                <a:solidFill>
+                  <a:srgbClr val="22282E"/>
+                </a:solidFill>
+              </a:rPr>
+              <a:t>•  Detectado al dumpear — Acceso a LSASS muy vigilado; asume telemetría (Sysmon EID 10)</a:t>
+            </a:r>
+          </a:p>
+        </p:txBody>
+      </p:sp>
+    </p:spTree>
+  </p:cSld>
+  <p:clrMapOvr>
+    <a:masterClrMapping/>
+  </p:clrMapOvr>
+</p:sld>
+</file>
+
+<file path=ppt/slides/slide13.xml><?xml version="1.0" encoding="utf-8"?>
+<p:sld xmlns:a="http://schemas.openxmlformats.org/drawingml/2006/main" xmlns:p="http://schemas.openxmlformats.org/presentationml/2006/main" xmlns:r="http://schemas.openxmlformats.org/officeDocument/2006/relationships">
+  <p:cSld>
+    <p:spTree>
+      <p:nvGrpSpPr>
+        <p:cNvPr id="1" name=""/>
+        <p:cNvGrpSpPr/>
+        <p:nvPr/>
+      </p:nvGrpSpPr>
+      <p:grpSpPr/>
+      <p:sp>
+        <p:nvSpPr>
+          <p:cNvPr id="2" name="TextBox 1"/>
+          <p:cNvSpPr txBox="1"/>
+          <p:nvPr/>
+        </p:nvSpPr>
+        <p:spPr>
+          <a:xfrm>
+            <a:off x="457200" y="320040"/>
+            <a:ext cx="8229600" cy="822960"/>
+          </a:xfrm>
+          <a:prstGeom prst="rect">
+            <a:avLst/>
+          </a:prstGeom>
+          <a:noFill/>
+        </p:spPr>
+        <p:txBody>
+          <a:bodyPr wrap="square">
+            <a:spAutoFit/>
+          </a:bodyPr>
+          <a:lstStyle/>
+          <a:p>
+            <a:r>
+              <a:rPr sz="2600" b="1">
+                <a:solidFill>
+                  <a:srgbClr val="0B3D2E"/>
+                </a:solidFill>
+              </a:rPr>
+              <a:t>❓ Preguntas frecuentes</a:t>
+            </a:r>
+          </a:p>
+        </p:txBody>
+      </p:sp>
+      <p:sp>
+        <p:nvSpPr>
+          <p:cNvPr id="3" name="TextBox 2"/>
+          <p:cNvSpPr txBox="1"/>
+          <p:nvPr/>
+        </p:nvSpPr>
+        <p:spPr>
+          <a:xfrm>
+            <a:off x="457200" y="1280160"/>
+            <a:ext cx="8229600" cy="4937760"/>
+          </a:xfrm>
+          <a:prstGeom prst="rect">
+            <a:avLst/>
+          </a:prstGeom>
+          <a:noFill/>
+        </p:spPr>
+        <p:txBody>
+          <a:bodyPr wrap="square">
+            <a:spAutoFit/>
+          </a:bodyPr>
+          <a:lstStyle/>
+          <a:p>
+            <a:pPr>
+              <a:spcAft>
+                <a:spcPts val="600"/>
+              </a:spcAft>
+            </a:pPr>
+            <a:r>
+              <a:rPr sz="1500">
+                <a:solidFill>
+                  <a:srgbClr val="22282E"/>
+                </a:solidFill>
+              </a:rPr>
+              <a:t>•  ❓ ¿PtH sigue funcionando en Windows moderno?</a:t>
+            </a:r>
+          </a:p>
+          <a:p>
+            <a:pPr>
+              <a:spcAft>
+                <a:spcPts val="600"/>
+              </a:spcAft>
+            </a:pPr>
+            <a:r>
+              <a:rPr sz="1500">
+                <a:solidFill>
+                  <a:srgbClr val="22282E"/>
+                </a:solidFill>
+              </a:rPr>
+              <a:t>•  Sí, mientras se use NTLM. Credential Guard, LSA protection y el modelo de tiering lo dificultan, pero muchos entornos siguen siendo vulnerables.</a:t>
+            </a:r>
+          </a:p>
+          <a:p>
+            <a:pPr>
+              <a:spcAft>
+                <a:spcPts val="600"/>
+              </a:spcAft>
+            </a:pPr>
+            <a:r>
+              <a:rPr sz="1500">
+                <a:solidFill>
+                  <a:srgbClr val="22282E"/>
+                </a:solidFill>
+              </a:rPr>
+              <a:t>•  ❓ ¿Diferencia entre PtH y PtT?</a:t>
+            </a:r>
+          </a:p>
+          <a:p>
+            <a:pPr>
+              <a:spcAft>
+                <a:spcPts val="600"/>
+              </a:spcAft>
+            </a:pPr>
+            <a:r>
+              <a:rPr sz="1500">
+                <a:solidFill>
+                  <a:srgbClr val="22282E"/>
+                </a:solidFill>
+              </a:rPr>
+              <a:t>•  PtH reutiliza el hash NTLM (autenticación NTLM); PtT reutiliza un ticket Kerberos ya emitido. Overpass-the-Hash es el puente: del hash a un TGT.</a:t>
+            </a:r>
+          </a:p>
+          <a:p>
+            <a:pPr>
+              <a:spcAft>
+                <a:spcPts val="600"/>
+              </a:spcAft>
+            </a:pPr>
+            <a:r>
+              <a:rPr sz="1500">
+                <a:solidFill>
+                  <a:srgbClr val="22282E"/>
+                </a:solidFill>
+              </a:rPr>
+              <a:t>•  ❓ ¿Cómo se defiende una organización?</a:t>
+            </a:r>
+          </a:p>
+          <a:p>
+            <a:pPr>
+              <a:spcAft>
+                <a:spcPts val="600"/>
+              </a:spcAft>
+            </a:pPr>
+            <a:r>
+              <a:rPr sz="1500">
+                <a:solidFill>
+                  <a:srgbClr val="22282E"/>
+                </a:solidFill>
+              </a:rPr>
+              <a:t>•  Credential Guard, deshabilitar NTLM donde se pueda, tiering administrativo, LAPS para contraseñas locales únicas y monitorización de accesos a LSASS.</a:t>
+            </a:r>
+          </a:p>
+        </p:txBody>
+      </p:sp>
+    </p:spTree>
+  </p:cSld>
+  <p:clrMapOvr>
+    <a:masterClrMapping/>
+  </p:clrMapOvr>
+</p:sld>
+</file>
+
+<file path=ppt/slides/slide14.xml><?xml version="1.0" encoding="utf-8"?>
+<p:sld xmlns:a="http://schemas.openxmlformats.org/drawingml/2006/main" xmlns:p="http://schemas.openxmlformats.org/presentationml/2006/main" xmlns:r="http://schemas.openxmlformats.org/officeDocument/2006/relationships">
+  <p:cSld>
+    <p:spTree>
+      <p:nvGrpSpPr>
+        <p:cNvPr id="1" name=""/>
+        <p:cNvGrpSpPr/>
+        <p:nvPr/>
+      </p:nvGrpSpPr>
+      <p:grpSpPr/>
+      <p:sp>
+        <p:nvSpPr>
+          <p:cNvPr id="2" name="TextBox 1"/>
+          <p:cNvSpPr txBox="1"/>
+          <p:nvPr/>
+        </p:nvSpPr>
+        <p:spPr>
+          <a:xfrm>
+            <a:off x="457200" y="320040"/>
+            <a:ext cx="8229600" cy="822960"/>
+          </a:xfrm>
+          <a:prstGeom prst="rect">
+            <a:avLst/>
+          </a:prstGeom>
+          <a:noFill/>
+        </p:spPr>
+        <p:txBody>
+          <a:bodyPr wrap="square">
+            <a:spAutoFit/>
+          </a:bodyPr>
+          <a:lstStyle/>
+          <a:p>
+            <a:r>
+              <a:rPr sz="2600" b="1">
+                <a:solidFill>
+                  <a:srgbClr val="0B3D2E"/>
+                </a:solidFill>
+              </a:rPr>
+              <a:t>🔗 Referencias</a:t>
+            </a:r>
+          </a:p>
+        </p:txBody>
+      </p:sp>
+      <p:sp>
+        <p:nvSpPr>
+          <p:cNvPr id="3" name="TextBox 2"/>
+          <p:cNvSpPr txBox="1"/>
+          <p:nvPr/>
+        </p:nvSpPr>
+        <p:spPr>
+          <a:xfrm>
+            <a:off x="457200" y="1280160"/>
+            <a:ext cx="8229600" cy="4937760"/>
+          </a:xfrm>
+          <a:prstGeom prst="rect">
+            <a:avLst/>
+          </a:prstGeom>
+          <a:noFill/>
+        </p:spPr>
+        <p:txBody>
+          <a:bodyPr wrap="square">
+            <a:spAutoFit/>
+          </a:bodyPr>
+          <a:lstStyle/>
+          <a:p>
+            <a:pPr>
+              <a:spcAft>
+                <a:spcPts val="600"/>
+              </a:spcAft>
+            </a:pPr>
+            <a:r>
+              <a:rPr sz="1500">
+                <a:solidFill>
+                  <a:srgbClr val="22282E"/>
+                </a:solidFill>
+              </a:rPr>
+              <a:t>•  Microsoft — Windows Authentication Architecture. &lt;https://learn.microsoft.com/en-us/windows-server/security/windows-authentication/windows-authentication-architecture&gt; — base para separar…</a:t>
+            </a:r>
+          </a:p>
+          <a:p>
+            <a:pPr>
+              <a:spcAft>
+                <a:spcPts val="600"/>
+              </a:spcAft>
+            </a:pPr>
+            <a:r>
+              <a:rPr sz="1500">
+                <a:solidFill>
+                  <a:srgbClr val="22282E"/>
+                </a:solidFill>
+              </a:rPr>
+              <a:t>•  Microsoft — Passwords technical overview. &lt;https://learn.microsoft.com/en-us/windows-server/security/kerberos/passwords-technical-overview&gt; — sustenta el papel del hash NT y cuándo Windows usa NTLM o…</a:t>
+            </a:r>
+          </a:p>
+          <a:p>
+            <a:pPr>
+              <a:spcAft>
+                <a:spcPts val="600"/>
+              </a:spcAft>
+            </a:pPr>
+            <a:r>
+              <a:rPr sz="1500">
+                <a:solidFill>
+                  <a:srgbClr val="22282E"/>
+                </a:solidFill>
+              </a:rPr>
+              <a:t>•  MITRE ATT&amp;CK — Pass the Hash (T1550.002). &lt;https://attack.mitre.org/techniques/T1550/002/&gt; — definición, mitigaciones y detección específicas de PtH.</a:t>
+            </a:r>
+          </a:p>
+          <a:p>
+            <a:pPr>
+              <a:spcAft>
+                <a:spcPts val="600"/>
+              </a:spcAft>
+            </a:pPr>
+            <a:r>
+              <a:rPr sz="1500">
+                <a:solidFill>
+                  <a:srgbClr val="22282E"/>
+                </a:solidFill>
+              </a:rPr>
+              <a:t>•  MITRE ATT&amp;CK — Pass the Ticket (T1550.003). &lt;https://attack.mitre.org/techniques/T1550/003/&gt; — definición y fuentes de telemetría específicas de PtT.</a:t>
+            </a:r>
+          </a:p>
+          <a:p>
+            <a:pPr>
+              <a:spcAft>
+                <a:spcPts val="600"/>
+              </a:spcAft>
+            </a:pPr>
+            <a:r>
+              <a:rPr sz="1500">
+                <a:solidFill>
+                  <a:srgbClr val="22282E"/>
+                </a:solidFill>
+              </a:rPr>
+              <a:t>•  Microsoft — Implementing Least-Privilege Administrative Models.…</a:t>
+            </a:r>
+          </a:p>
+          <a:p>
+            <a:pPr>
+              <a:spcAft>
+                <a:spcPts val="600"/>
+              </a:spcAft>
+            </a:pPr>
+            <a:r>
+              <a:rPr sz="1500">
+                <a:solidFill>
+                  <a:srgbClr val="22282E"/>
+                </a:solidFill>
+              </a:rPr>
+              <a:t>•  Impacket. &lt;https://github.com/fortra/impacket&gt; y Rubeus. &lt;https://github.com/GhostPack/Rubeus&gt; — referencias de herramientas usadas en el laboratorio controlado.</a:t>
+            </a:r>
+          </a:p>
+        </p:txBody>
+      </p:sp>
+    </p:spTree>
+  </p:cSld>
+  <p:clrMapOvr>
+    <a:masterClrMapping/>
+  </p:clrMapOvr>
+</p:sld>
+</file>
+
+<file path=ppt/slides/slide15.xml><?xml version="1.0" encoding="utf-8"?>
+<p:sld xmlns:a="http://schemas.openxmlformats.org/drawingml/2006/main" xmlns:p="http://schemas.openxmlformats.org/presentationml/2006/main" xmlns:r="http://schemas.openxmlformats.org/officeDocument/2006/relationships">
+  <p:cSld>
+    <p:spTree>
+      <p:nvGrpSpPr>
+        <p:cNvPr id="1" name=""/>
+        <p:cNvGrpSpPr/>
+        <p:nvPr/>
+      </p:nvGrpSpPr>
+      <p:grpSpPr/>
+      <p:sp>
+        <p:nvSpPr>
+          <p:cNvPr id="2" name="TextBox 1"/>
+          <p:cNvSpPr txBox="1"/>
+          <p:nvPr/>
+        </p:nvSpPr>
+        <p:spPr>
+          <a:xfrm>
+            <a:off x="457200" y="274320"/>
+            <a:ext cx="8229600" cy="640080"/>
+          </a:xfrm>
+          <a:prstGeom prst="rect">
+            <a:avLst/>
+          </a:prstGeom>
+          <a:noFill/>
+        </p:spPr>
+        <p:txBody>
+          <a:bodyPr wrap="square">
+            <a:spAutoFit/>
+          </a:bodyPr>
+          <a:lstStyle/>
+          <a:p>
+            <a:r>
+              <a:rPr sz="2200" b="1">
+                <a:solidFill>
+                  <a:srgbClr val="0B3D2E"/>
+                </a:solidFill>
+              </a:rPr>
+              <a:t>Diagrama de la clase</a:t>
+            </a:r>
+          </a:p>
+        </p:txBody>
+      </p:sp>
+      <p:pic>
+        <p:nvPicPr>
+          <p:cNvPr id="3" name="Picture 2" descr="45e46885392141b1.png"/>
+          <p:cNvPicPr>
+            <a:picLocks noChangeAspect="1"/>
+          </p:cNvPicPr>
+          <p:nvPr/>
+        </p:nvPicPr>
+        <p:blipFill>
+          <a:blip r:embed="rId2"/>
+          <a:stretch>
+            <a:fillRect/>
+          </a:stretch>
+        </p:blipFill>
+        <p:spPr>
+          <a:xfrm>
+            <a:off x="457200" y="2286000"/>
+            <a:ext cx="8229600" cy="2926080"/>
+          </a:xfrm>
+          <a:prstGeom prst="rect">
+            <a:avLst/>
+          </a:prstGeom>
+        </p:spPr>
+      </p:pic>
     </p:spTree>
   </p:cSld>
   <p:clrMapOvr>
@@ -3683,7 +4059,7 @@
                   <a:srgbClr val="22282E"/>
                 </a:solidFill>
               </a:rPr>
-              <a:t>•  Dominar el movimiento lateral en Active Directory mediante reutilización de credenciales sin conocer la contraseña en claro: Pass-the-Hash (PtH), Pass-the-Ticket (PtT) y Overpass-the-Hash. El alumno aprenderá a extraer material de autenticación, reutilizarlo para autenticarse en otras máquinas del lab y entender por qué NTLM y Kerberos permiten estos abusos.</a:t>
+              <a:t>•  Dominar el movimiento lateral en Active Directory mediante reutilización de credenciales sin conocer la contraseña en claro: Pass-the-Hash (PtH), Pass-the-Ticket (PtT) y Overpass-the-Hash. El alumno…</a:t>
             </a:r>
           </a:p>
         </p:txBody>
@@ -4077,7 +4453,7 @@
                   <a:srgbClr val="0B3D2E"/>
                 </a:solidFill>
               </a:rPr>
-              <a:t>📖 Definiciones y características</a:t>
+              <a:t>🧠 Explicación en profundidad</a:t>
             </a:r>
           </a:p>
         </p:txBody>
@@ -4115,82 +4491,97 @@
                   <a:srgbClr val="22282E"/>
                 </a:solidFill>
               </a:rPr>
-              <a:t>•  Hash NTLM: derivado de la contraseña usado por NTLM. Característica: "es" la credencial en NTLM; no hace falta descifrarlo.</a:t>
-            </a:r>
-          </a:p>
-          <a:p>
-            <a:pPr>
-              <a:spcAft>
-                <a:spcPts val="600"/>
-              </a:spcAft>
-            </a:pPr>
-            <a:r>
-              <a:rPr sz="1500">
-                <a:solidFill>
-                  <a:srgbClr val="22282E"/>
-                </a:solidFill>
-              </a:rPr>
-              <a:t>•  Pass-the-Hash (PtH): autenticarse presentando el hash NTLM. Característica: funciona porque NTLM no exige la contraseña en claro.</a:t>
-            </a:r>
-          </a:p>
-          <a:p>
-            <a:pPr>
-              <a:spcAft>
-                <a:spcPts val="600"/>
-              </a:spcAft>
-            </a:pPr>
-            <a:r>
-              <a:rPr sz="1500">
-                <a:solidFill>
-                  <a:srgbClr val="22282E"/>
-                </a:solidFill>
-              </a:rPr>
-              <a:t>•  Pass-the-Ticket (PtT): inyectar un TGT/TGS robado en la sesión. Característica: reutiliza autenticación Kerberos válida.</a:t>
-            </a:r>
-          </a:p>
-          <a:p>
-            <a:pPr>
-              <a:spcAft>
-                <a:spcPts val="600"/>
-              </a:spcAft>
-            </a:pPr>
-            <a:r>
-              <a:rPr sz="1500">
-                <a:solidFill>
-                  <a:srgbClr val="22282E"/>
-                </a:solidFill>
-              </a:rPr>
-              <a:t>•  Overpass-the-Hash: usar el hash para pedir un TGT (Kerberos) y así moverse. Característica: combina lo mejor de PtH con Kerberos.</a:t>
-            </a:r>
-          </a:p>
-          <a:p>
-            <a:pPr>
-              <a:spcAft>
-                <a:spcPts val="600"/>
-              </a:spcAft>
-            </a:pPr>
-            <a:r>
-              <a:rPr sz="1500">
-                <a:solidFill>
-                  <a:srgbClr val="22282E"/>
-                </a:solidFill>
-              </a:rPr>
-              <a:t>•  LSASS: proceso que guarda credenciales en memoria. Característica: fuente principal de extracción.</a:t>
-            </a:r>
-          </a:p>
-          <a:p>
-            <a:pPr>
-              <a:spcAft>
-                <a:spcPts val="600"/>
-              </a:spcAft>
-            </a:pPr>
-            <a:r>
-              <a:rPr sz="1500">
-                <a:solidFill>
-                  <a:srgbClr val="22282E"/>
-                </a:solidFill>
-              </a:rPr>
-              <a:t>•  Credential Guard: aísla secretos con virtualización. Característica: rompe muchas técnicas de extracción/PtH.</a:t>
+              <a:t>•  Windows puede representar la capacidad de autenticarse mediante distintos materiales: una contraseña, claves derivadas, un hash NT empleado en intercambios NTLM o un ticket Kerberos vigente.…</a:t>
+            </a:r>
+          </a:p>
+          <a:p>
+            <a:pPr>
+              <a:spcAft>
+                <a:spcPts val="600"/>
+              </a:spcAft>
+            </a:pPr>
+            <a:r>
+              <a:rPr sz="1500">
+                <a:solidFill>
+                  <a:srgbClr val="22282E"/>
+                </a:solidFill>
+              </a:rPr>
+              <a:t>•  En NTLM, el cliente demuestra conocimiento de un secreto respondiendo a un desafío. Si alguien obtiene el hash NT adecuado, puede producir esa respuesta sin conocer la contraseña en claro. En…</a:t>
+            </a:r>
+          </a:p>
+          <a:p>
+            <a:pPr>
+              <a:spcAft>
+                <a:spcPts val="600"/>
+              </a:spcAft>
+            </a:pPr>
+            <a:r>
+              <a:rPr sz="1500">
+                <a:solidFill>
+                  <a:srgbClr val="22282E"/>
+                </a:solidFill>
+              </a:rPr>
+              <a:t>•  Que el protocolo acepte el material confirma una identidad o sesión. El recurso todavía aplica permisos, grupos, políticas de inicio de sesión y segmentación. Un hash de una cuenta sin derechos…</a:t>
+            </a:r>
+          </a:p>
+          <a:p>
+            <a:pPr>
+              <a:spcAft>
+                <a:spcPts val="600"/>
+              </a:spcAft>
+            </a:pPr>
+            <a:r>
+              <a:rPr sz="1500">
+                <a:solidFill>
+                  <a:srgbClr val="22282E"/>
+                </a:solidFill>
+              </a:rPr>
+              <a:t>•  El llamado overpass-the-hash usa material de clave para obtener credenciales Kerberos en vez de continuar mediante NTLM. Lo relevante no es memorizar nombres de herramientas, sino reconocer la…</a:t>
+            </a:r>
+          </a:p>
+          <a:p>
+            <a:pPr>
+              <a:spcAft>
+                <a:spcPts val="600"/>
+              </a:spcAft>
+            </a:pPr>
+            <a:r>
+              <a:rPr sz="1500">
+                <a:solidFill>
+                  <a:srgbClr val="22282E"/>
+                </a:solidFill>
+              </a:rPr>
+              <a:t>•  LSASS participa en autenticación y mantiene material necesario para sesiones; su contenido y aislamiento varían por versión, configuración y tipo de inicio de sesión. Credential Guard usa seguridad…</a:t>
+            </a:r>
+          </a:p>
+          <a:p>
+            <a:pPr>
+              <a:spcAft>
+                <a:spcPts val="600"/>
+              </a:spcAft>
+            </a:pPr>
+            <a:r>
+              <a:rPr sz="1500">
+                <a:solidFill>
+                  <a:srgbClr val="22282E"/>
+                </a:solidFill>
+              </a:rPr>
+              <a:t>•  La pregunta defensiva decisiva es dónde una identidad privilegiada deja material reutilizable. Si un administrador inicia sesión en un equipo de menor confianza, ese equipo puede convertirse en…</a:t>
+            </a:r>
+          </a:p>
+          <a:p>
+            <a:pPr>
+              <a:spcAft>
+                <a:spcPts val="600"/>
+              </a:spcAft>
+            </a:pPr>
+            <a:r>
+              <a:rPr sz="1500">
+                <a:solidFill>
+                  <a:srgbClr val="22282E"/>
+                </a:solidFill>
+              </a:rPr>
+              <a:t>•  Los eventos se correlacionan entre equipo origen, destino y controlador de dominio. Un inicio de sesión de red no demuestra PtH por sí solo. Se buscan combinaciones: protocolo inesperado, cuenta…</a:t>
             </a:r>
           </a:p>
         </p:txBody>
@@ -4241,7 +4632,7 @@
                   <a:srgbClr val="0B3D2E"/>
                 </a:solidFill>
               </a:rPr>
-              <a:t>🧰 Herramientas y preparación</a:t>
+              <a:t>📖 Definiciones y características</a:t>
             </a:r>
           </a:p>
         </p:txBody>
@@ -4279,37 +4670,82 @@
                   <a:srgbClr val="22282E"/>
                 </a:solidFill>
               </a:rPr>
-              <a:t>•  AD lab / GOAD con varias máquinas y una cuenta local admin reutilizada (escenario clásico).</a:t>
-            </a:r>
-          </a:p>
-          <a:p>
-            <a:pPr>
-              <a:spcAft>
-                <a:spcPts val="600"/>
-              </a:spcAft>
-            </a:pPr>
-            <a:r>
-              <a:rPr sz="1500">
-                <a:solidFill>
-                  <a:srgbClr val="22282E"/>
-                </a:solidFill>
-              </a:rPr>
-              <a:t>•  Mimikatz / pypykatz para extracción; Impacket (psexec.py, wmiexec.py, secretsdump.py); NetExec (nxc); Rubeus para tickets.</a:t>
-            </a:r>
-          </a:p>
-          <a:p>
-            <a:pPr>
-              <a:spcAft>
-                <a:spcPts val="600"/>
-              </a:spcAft>
-            </a:pPr>
-            <a:r>
-              <a:rPr sz="1500">
-                <a:solidFill>
-                  <a:srgbClr val="22282E"/>
-                </a:solidFill>
-              </a:rPr>
-              <a:t>•  Privilegios de administrador local en la máquina de origen (para leer LSASS).</a:t>
+              <a:t>•  Hash NT: valor derivado de la contraseña que participa en autenticación NTLM. Característica: su exposición puede permitir producir respuestas válidas sin recuperar la contraseña legible.</a:t>
+            </a:r>
+          </a:p>
+          <a:p>
+            <a:pPr>
+              <a:spcAft>
+                <a:spcPts val="600"/>
+              </a:spcAft>
+            </a:pPr>
+            <a:r>
+              <a:rPr sz="1500">
+                <a:solidFill>
+                  <a:srgbClr val="22282E"/>
+                </a:solidFill>
+              </a:rPr>
+              <a:t>•  Pass-the-Hash (PtH): autenticarse presentando el hash NTLM. Característica: funciona porque NTLM no exige la contraseña en claro.</a:t>
+            </a:r>
+          </a:p>
+          <a:p>
+            <a:pPr>
+              <a:spcAft>
+                <a:spcPts val="600"/>
+              </a:spcAft>
+            </a:pPr>
+            <a:r>
+              <a:rPr sz="1500">
+                <a:solidFill>
+                  <a:srgbClr val="22282E"/>
+                </a:solidFill>
+              </a:rPr>
+              <a:t>•  Pass-the-Ticket (PtT): inyectar un TGT/TGS robado en la sesión. Característica: reutiliza autenticación Kerberos válida.</a:t>
+            </a:r>
+          </a:p>
+          <a:p>
+            <a:pPr>
+              <a:spcAft>
+                <a:spcPts val="600"/>
+              </a:spcAft>
+            </a:pPr>
+            <a:r>
+              <a:rPr sz="1500">
+                <a:solidFill>
+                  <a:srgbClr val="22282E"/>
+                </a:solidFill>
+              </a:rPr>
+              <a:t>•  Overpass-the-Hash: usar el hash para pedir un TGT (Kerberos) y así moverse. Característica: combina lo mejor de PtH con Kerberos.</a:t>
+            </a:r>
+          </a:p>
+          <a:p>
+            <a:pPr>
+              <a:spcAft>
+                <a:spcPts val="600"/>
+              </a:spcAft>
+            </a:pPr>
+            <a:r>
+              <a:rPr sz="1500">
+                <a:solidFill>
+                  <a:srgbClr val="22282E"/>
+                </a:solidFill>
+              </a:rPr>
+              <a:t>•  LSASS: proceso que guarda credenciales en memoria. Característica: fuente principal de extracción.</a:t>
+            </a:r>
+          </a:p>
+          <a:p>
+            <a:pPr>
+              <a:spcAft>
+                <a:spcPts val="600"/>
+              </a:spcAft>
+            </a:pPr>
+            <a:r>
+              <a:rPr sz="1500">
+                <a:solidFill>
+                  <a:srgbClr val="22282E"/>
+                </a:solidFill>
+              </a:rPr>
+              <a:t>•  Credential Guard: aísla determinados secretos mediante seguridad basada en virtualización. Característica: reduce rutas de extracción, pero no reemplaza separación administrativa ni reducción de NTLM.</a:t>
             </a:r>
           </a:p>
         </p:txBody>
@@ -4360,7 +4796,7 @@
                   <a:srgbClr val="0B3D2E"/>
                 </a:solidFill>
               </a:rPr>
-              <a:t>🧪 Laboratorio guiado</a:t>
+              <a:t>📔 Glosario</a:t>
             </a:r>
           </a:p>
         </p:txBody>
@@ -4398,97 +4834,97 @@
                   <a:srgbClr val="22282E"/>
                 </a:solidFill>
               </a:rPr>
-              <a:t>•  Extrae hashes (con admin local). En la máquina de origen del lab:</a:t>
-            </a:r>
-          </a:p>
-          <a:p>
-            <a:pPr>
-              <a:spcAft>
-                <a:spcPts val="600"/>
-              </a:spcAft>
-            </a:pPr>
-            <a:r>
-              <a:rPr sz="1500">
-                <a:solidFill>
-                  <a:srgbClr val="22282E"/>
-                </a:solidFill>
-              </a:rPr>
-              <a:t>•  secretsdump.py lab.local/adminlocal:pass@10.10.10.20</a:t>
-            </a:r>
-          </a:p>
-          <a:p>
-            <a:pPr>
-              <a:spcAft>
-                <a:spcPts val="600"/>
-              </a:spcAft>
-            </a:pPr>
-            <a:r>
-              <a:rPr sz="1500">
-                <a:solidFill>
-                  <a:srgbClr val="22282E"/>
-                </a:solidFill>
-              </a:rPr>
-              <a:t>•  o pypykatz lsa minidump lsass.dmp sobre un volcado.</a:t>
-            </a:r>
-          </a:p>
-          <a:p>
-            <a:pPr>
-              <a:spcAft>
-                <a:spcPts val="600"/>
-              </a:spcAft>
-            </a:pPr>
-            <a:r>
-              <a:rPr sz="1500">
-                <a:solidFill>
-                  <a:srgbClr val="22282E"/>
-                </a:solidFill>
-              </a:rPr>
-              <a:t>•  Pass-the-Hash con nxc:</a:t>
-            </a:r>
-          </a:p>
-          <a:p>
-            <a:pPr>
-              <a:spcAft>
-                <a:spcPts val="600"/>
-              </a:spcAft>
-            </a:pPr>
-            <a:r>
-              <a:rPr sz="1500">
-                <a:solidFill>
-                  <a:srgbClr val="22282E"/>
-                </a:solidFill>
-              </a:rPr>
-              <a:t>•  nxc smb 10.10.10.30 -u Administrator -H &lt;NTLMHASH&gt; --local-auth</a:t>
-            </a:r>
-          </a:p>
-          <a:p>
-            <a:pPr>
-              <a:spcAft>
-                <a:spcPts val="600"/>
-              </a:spcAft>
-            </a:pPr>
-            <a:r>
-              <a:rPr sz="1500">
-                <a:solidFill>
-                  <a:srgbClr val="22282E"/>
-                </a:solidFill>
-              </a:rPr>
-              <a:t>•  Autentícate sin conocer la contraseña.</a:t>
-            </a:r>
-          </a:p>
-          <a:p>
-            <a:pPr>
-              <a:spcAft>
-                <a:spcPts val="600"/>
-              </a:spcAft>
-            </a:pPr>
-            <a:r>
-              <a:rPr sz="1500">
-                <a:solidFill>
-                  <a:srgbClr val="22282E"/>
-                </a:solidFill>
-              </a:rPr>
-              <a:t>•  Ejecución remota por PtH:</a:t>
+              <a:t>•  Material de autenticación: secreto, clave o ticket que permite demostrar una identidad.</a:t>
+            </a:r>
+          </a:p>
+          <a:p>
+            <a:pPr>
+              <a:spcAft>
+                <a:spcPts val="600"/>
+              </a:spcAft>
+            </a:pPr>
+            <a:r>
+              <a:rPr sz="1500">
+                <a:solidFill>
+                  <a:srgbClr val="22282E"/>
+                </a:solidFill>
+              </a:rPr>
+              <a:t>•  Hash NT: valor derivado de la contraseña usado en mecanismos Windows heredados.</a:t>
+            </a:r>
+          </a:p>
+          <a:p>
+            <a:pPr>
+              <a:spcAft>
+                <a:spcPts val="600"/>
+              </a:spcAft>
+            </a:pPr>
+            <a:r>
+              <a:rPr sz="1500">
+                <a:solidFill>
+                  <a:srgbClr val="22282E"/>
+                </a:solidFill>
+              </a:rPr>
+              <a:t>•  NTLM: familia de protocolos basada en desafío-respuesta.</a:t>
+            </a:r>
+          </a:p>
+          <a:p>
+            <a:pPr>
+              <a:spcAft>
+                <a:spcPts val="600"/>
+              </a:spcAft>
+            </a:pPr>
+            <a:r>
+              <a:rPr sz="1500">
+                <a:solidFill>
+                  <a:srgbClr val="22282E"/>
+                </a:solidFill>
+              </a:rPr>
+              <a:t>•  PtH: reutilización de un hash NT para autenticarse mediante NTLM.</a:t>
+            </a:r>
+          </a:p>
+          <a:p>
+            <a:pPr>
+              <a:spcAft>
+                <a:spcPts val="600"/>
+              </a:spcAft>
+            </a:pPr>
+            <a:r>
+              <a:rPr sz="1500">
+                <a:solidFill>
+                  <a:srgbClr val="22282E"/>
+                </a:solidFill>
+              </a:rPr>
+              <a:t>•  PtT: reutilización de un ticket Kerberos obtenido de otra sesión o contexto.</a:t>
+            </a:r>
+          </a:p>
+          <a:p>
+            <a:pPr>
+              <a:spcAft>
+                <a:spcPts val="600"/>
+              </a:spcAft>
+            </a:pPr>
+            <a:r>
+              <a:rPr sz="1500">
+                <a:solidFill>
+                  <a:srgbClr val="22282E"/>
+                </a:solidFill>
+              </a:rPr>
+              <a:t>•  Overpass-the-Hash: uso de material de clave para solicitar tickets Kerberos.</a:t>
+            </a:r>
+          </a:p>
+          <a:p>
+            <a:pPr>
+              <a:spcAft>
+                <a:spcPts val="600"/>
+              </a:spcAft>
+            </a:pPr>
+            <a:r>
+              <a:rPr sz="1500">
+                <a:solidFill>
+                  <a:srgbClr val="22282E"/>
+                </a:solidFill>
+              </a:rPr>
+              <a:t>•  LSASS: proceso de autoridad de seguridad local que participa en autenticación.</a:t>
             </a:r>
           </a:p>
         </p:txBody>
@@ -4539,7 +4975,7 @@
                   <a:srgbClr val="0B3D2E"/>
                 </a:solidFill>
               </a:rPr>
-              <a:t>✍️ Ejercicios</a:t>
+              <a:t>🧰 Herramientas y preparación</a:t>
             </a:r>
           </a:p>
         </p:txBody>
@@ -4577,82 +5013,37 @@
                   <a:srgbClr val="22282E"/>
                 </a:solidFill>
               </a:rPr>
-              <a:t>•  Explica por qué NTLM permite Pass-the-Hash y Kerberos no directamente.</a:t>
-            </a:r>
-          </a:p>
-          <a:p>
-            <a:pPr>
-              <a:spcAft>
-                <a:spcPts val="600"/>
-              </a:spcAft>
-            </a:pPr>
-            <a:r>
-              <a:rPr sz="1500">
-                <a:solidFill>
-                  <a:srgbClr val="22282E"/>
-                </a:solidFill>
-              </a:rPr>
-              <a:t>•  Ejecuta PtH para acceder a una segunda máquina del lab.</a:t>
-            </a:r>
-          </a:p>
-          <a:p>
-            <a:pPr>
-              <a:spcAft>
-                <a:spcPts val="600"/>
-              </a:spcAft>
-            </a:pPr>
-            <a:r>
-              <a:rPr sz="1500">
-                <a:solidFill>
-                  <a:srgbClr val="22282E"/>
-                </a:solidFill>
-              </a:rPr>
-              <a:t>•  Realiza Overpass-the-Hash y confirma el TGT con klist.</a:t>
-            </a:r>
-          </a:p>
-          <a:p>
-            <a:pPr>
-              <a:spcAft>
-                <a:spcPts val="600"/>
-              </a:spcAft>
-            </a:pPr>
-            <a:r>
-              <a:rPr sz="1500">
-                <a:solidFill>
-                  <a:srgbClr val="22282E"/>
-                </a:solidFill>
-              </a:rPr>
-              <a:t>•  Roba e inyecta un TGT para moverte a una tercera máquina.</a:t>
-            </a:r>
-          </a:p>
-          <a:p>
-            <a:pPr>
-              <a:spcAft>
-                <a:spcPts val="600"/>
-              </a:spcAft>
-            </a:pPr>
-            <a:r>
-              <a:rPr sz="1500">
-                <a:solidFill>
-                  <a:srgbClr val="22282E"/>
-                </a:solidFill>
-              </a:rPr>
-              <a:t>•  Investiga cómo Credential Guard rompe la extracción de LSASS.</a:t>
-            </a:r>
-          </a:p>
-          <a:p>
-            <a:pPr>
-              <a:spcAft>
-                <a:spcPts val="600"/>
-              </a:spcAft>
-            </a:pPr>
-            <a:r>
-              <a:rPr sz="1500">
-                <a:solidFill>
-                  <a:srgbClr val="22282E"/>
-                </a:solidFill>
-              </a:rPr>
-              <a:t>•  Describe el modelo de tiering de Microsoft y cómo limita el movimiento lateral.</a:t>
+              <a:t>•  AD lab / GOAD con varias máquinas y una cuenta local admin reutilizada (escenario clásico).</a:t>
+            </a:r>
+          </a:p>
+          <a:p>
+            <a:pPr>
+              <a:spcAft>
+                <a:spcPts val="600"/>
+              </a:spcAft>
+            </a:pPr>
+            <a:r>
+              <a:rPr sz="1500">
+                <a:solidFill>
+                  <a:srgbClr val="22282E"/>
+                </a:solidFill>
+              </a:rPr>
+              <a:t>•  Mimikatz / pypykatz para extracción; Impacket (psexec.py, wmiexec.py, secretsdump.py); NetExec (nxc); Rubeus para tickets.</a:t>
+            </a:r>
+          </a:p>
+          <a:p>
+            <a:pPr>
+              <a:spcAft>
+                <a:spcPts val="600"/>
+              </a:spcAft>
+            </a:pPr>
+            <a:r>
+              <a:rPr sz="1500">
+                <a:solidFill>
+                  <a:srgbClr val="22282E"/>
+                </a:solidFill>
+              </a:rPr>
+              <a:t>•  Privilegios de administrador local en la máquina de origen (para leer LSASS).</a:t>
             </a:r>
           </a:p>
         </p:txBody>
@@ -4703,7 +5094,7 @@
                   <a:srgbClr val="0B3D2E"/>
                 </a:solidFill>
               </a:rPr>
-              <a:t>📝 Reto verificable</a:t>
+              <a:t>🧪 Laboratorio guiado</a:t>
             </a:r>
           </a:p>
         </p:txBody>
@@ -4741,22 +5132,97 @@
                   <a:srgbClr val="22282E"/>
                 </a:solidFill>
               </a:rPr>
-              <a:t>•  Partiendo de admin local en una máquina del lab, muévete lateralmente a otras dos máquinas usando Pass-the-Hash y Pass-the-Ticket (una técnica cada una), sin conocer contraseñas en claro.</a:t>
-            </a:r>
-          </a:p>
-          <a:p>
-            <a:pPr>
-              <a:spcAft>
-                <a:spcPts val="600"/>
-              </a:spcAft>
-            </a:pPr>
-            <a:r>
-              <a:rPr sz="1500">
-                <a:solidFill>
-                  <a:srgbClr val="22282E"/>
-                </a:solidFill>
-              </a:rPr>
-              <a:t>•  Criterio de aceptación: obtienes ejecución de comandos en dos máquinas destino distintas, una vía PtH y otra vía PtT, mostrando los comandos empleados y el material (hash/ticket) reutilizado. Todo en tu laboratorio.</a:t>
+              <a:t>•  Extrae hashes (con admin local). En la máquina de origen del lab:</a:t>
+            </a:r>
+          </a:p>
+          <a:p>
+            <a:pPr>
+              <a:spcAft>
+                <a:spcPts val="600"/>
+              </a:spcAft>
+            </a:pPr>
+            <a:r>
+              <a:rPr sz="1500">
+                <a:solidFill>
+                  <a:srgbClr val="22282E"/>
+                </a:solidFill>
+              </a:rPr>
+              <a:t>•  o pypykatz lsa minidump lsass.dmp sobre un volcado.</a:t>
+            </a:r>
+          </a:p>
+          <a:p>
+            <a:pPr>
+              <a:spcAft>
+                <a:spcPts val="600"/>
+              </a:spcAft>
+            </a:pPr>
+            <a:r>
+              <a:rPr sz="1500">
+                <a:solidFill>
+                  <a:srgbClr val="22282E"/>
+                </a:solidFill>
+              </a:rPr>
+              <a:t>•  Pass-the-Hash con nxc:</a:t>
+            </a:r>
+          </a:p>
+          <a:p>
+            <a:pPr>
+              <a:spcAft>
+                <a:spcPts val="600"/>
+              </a:spcAft>
+            </a:pPr>
+            <a:r>
+              <a:rPr sz="1500">
+                <a:solidFill>
+                  <a:srgbClr val="22282E"/>
+                </a:solidFill>
+              </a:rPr>
+              <a:t>•  Autentícate sin conocer la contraseña.</a:t>
+            </a:r>
+          </a:p>
+          <a:p>
+            <a:pPr>
+              <a:spcAft>
+                <a:spcPts val="600"/>
+              </a:spcAft>
+            </a:pPr>
+            <a:r>
+              <a:rPr sz="1500">
+                <a:solidFill>
+                  <a:srgbClr val="22282E"/>
+                </a:solidFill>
+              </a:rPr>
+              <a:t>•  Ejecución remota por PtH:</a:t>
+            </a:r>
+          </a:p>
+          <a:p>
+            <a:pPr>
+              <a:spcAft>
+                <a:spcPts val="600"/>
+              </a:spcAft>
+            </a:pPr>
+            <a:r>
+              <a:rPr sz="1500">
+                <a:solidFill>
+                  <a:srgbClr val="22282E"/>
+                </a:solidFill>
+              </a:rPr>
+              <a:t>•  Overpass-the-Hash con Rubeus: Rubeus.exe asktgt /user:svc /rc4:&lt;HASH&gt; /ptt para obtener e inyectar un TGT.</a:t>
+            </a:r>
+          </a:p>
+          <a:p>
+            <a:pPr>
+              <a:spcAft>
+                <a:spcPts val="600"/>
+              </a:spcAft>
+            </a:pPr>
+            <a:r>
+              <a:rPr sz="1500">
+                <a:solidFill>
+                  <a:srgbClr val="22282E"/>
+                </a:solidFill>
+              </a:rPr>
+              <a:t>•  Pass-the-Ticket: exporta un TGT (Rubeus dump / mimikatz sekurlsa::tickets /export) e inyéctalo con Rubeus.exe ptt /ticket:ticket.kirbi.</a:t>
             </a:r>
           </a:p>
         </p:txBody>
